--- a/docs/presentations/share-copilot-capacity.pptx
+++ b/docs/presentations/share-copilot-capacity.pptx
@@ -5288,7 +5288,7 @@
                 </a:solidFill>
                 <a:latin typeface="Arial"/>
               </a:rPr>
-              <a:t>Sr. Software Engineer / Solution Architect</a:t>
+              <a:t>Solution Architect</a:t>
             </a:r>
           </a:p>
           <a:p>
@@ -14323,7 +14323,7 @@
                 </a:solidFill>
                 <a:latin typeface="Arial"/>
               </a:rPr>
-              <a:t>Wallace Espindola</a:t>
+              <a:t>Wallace Espindola, Solution Architect</a:t>
             </a:r>
           </a:p>
           <a:p>

--- a/docs/presentations/share-copilot-capacity.pptx
+++ b/docs/presentations/share-copilot-capacity.pptx
@@ -4,6 +4,9 @@
   <p:sldMasterIdLst>
     <p:sldMasterId id="2147483648" r:id="rId1"/>
   </p:sldMasterIdLst>
+  <p:notesMasterIdLst>
+    <p:notesMasterId r:id="rId28"/>
+  </p:notesMasterIdLst>
   <p:sldIdLst>
     <p:sldId id="256" r:id="rId7"/>
     <p:sldId id="257" r:id="rId8"/>
